--- a/apps/relatorio-energia/templates/template_relatorio_gestao_energia.pptx
+++ b/apps/relatorio-energia/templates/template_relatorio_gestao_energia.pptx
@@ -8966,7 +8966,7 @@
               </a:defRPr>
             </a:pPr>
             <a:r>
-              <a:t>-{{ENERGIA_INJETADA_KWH}}</a:t>
+              <a:t>{{ENERGIA_COMPENSADA_KWH}}</a:t>
             </a:r>
           </a:p>
         </p:txBody>
